--- a/classes/parte-1-machine-learning-clasico/070-gradient-descent-batch-stochastic-mini-batch/clase-070-gradient-descent-batch-stochastic-mini-batch-presentacion.pptx
+++ b/classes/parte-1-machine-learning-clasico/070-gradient-descent-batch-stochastic-mini-batch/clase-070-gradient-descent-batch-stochastic-mini-batch-presentacion.pptx
@@ -4955,7 +4955,7 @@
                 </a:solidFill>
                 <a:latin typeface="Segoe UI"/>
               </a:rPr>
-              <a:t>Primer bloque ejecutable del notebook.</a:t>
+              <a:t>$y = 4 + 3x + \text{ruido}$, con $m=200$. El $\theta$ verdadero es $[4, 3]$; lo usaremos para verificar que las tres variantes convergen.</a:t>
             </a:r>
           </a:p>
         </p:txBody>
@@ -5042,7 +5042,178 @@
                 </a:solidFill>
                 <a:latin typeface="Courier New"/>
               </a:rPr>
-              <a:t># Imports y configuración inicial</a:t>
+              <a:t>import numpy as np</a:t>
+            </a:r>
+          </a:p>
+          <a:p>
+            <a:pPr>
+              <a:defRPr sz="1200" b="0">
+                <a:solidFill>
+                  <a:srgbClr val="F8FAFC"/>
+                </a:solidFill>
+                <a:latin typeface="Courier New"/>
+              </a:defRPr>
+            </a:pPr>
+            <a:r>
+              <a:rPr sz="1200" b="0">
+                <a:solidFill>
+                  <a:srgbClr val="F8FAFC"/>
+                </a:solidFill>
+                <a:latin typeface="Courier New"/>
+              </a:rPr>
+              <a:t>import matplotlib.pyplot as plt</a:t>
+            </a:r>
+          </a:p>
+          <a:p>
+            <a:pPr>
+              <a:defRPr sz="1200" b="0">
+                <a:solidFill>
+                  <a:srgbClr val="F8FAFC"/>
+                </a:solidFill>
+                <a:latin typeface="Courier New"/>
+              </a:defRPr>
+            </a:pPr>
+            <a:r>
+              <a:rPr sz="1200" b="0">
+                <a:solidFill>
+                  <a:srgbClr val="F8FAFC"/>
+                </a:solidFill>
+                <a:latin typeface="Courier New"/>
+              </a:rPr>
+              <a:t> </a:t>
+            </a:r>
+          </a:p>
+          <a:p>
+            <a:pPr>
+              <a:defRPr sz="1200" b="0">
+                <a:solidFill>
+                  <a:srgbClr val="F8FAFC"/>
+                </a:solidFill>
+                <a:latin typeface="Courier New"/>
+              </a:defRPr>
+            </a:pPr>
+            <a:r>
+              <a:rPr sz="1200" b="0">
+                <a:solidFill>
+                  <a:srgbClr val="F8FAFC"/>
+                </a:solidFill>
+                <a:latin typeface="Courier New"/>
+              </a:rPr>
+              <a:t>np.random.seed(42)</a:t>
+            </a:r>
+          </a:p>
+          <a:p>
+            <a:pPr>
+              <a:defRPr sz="1200" b="0">
+                <a:solidFill>
+                  <a:srgbClr val="F8FAFC"/>
+                </a:solidFill>
+                <a:latin typeface="Courier New"/>
+              </a:defRPr>
+            </a:pPr>
+            <a:r>
+              <a:rPr sz="1200" b="0">
+                <a:solidFill>
+                  <a:srgbClr val="F8FAFC"/>
+                </a:solidFill>
+                <a:latin typeface="Courier New"/>
+              </a:rPr>
+              <a:t>m = 200</a:t>
+            </a:r>
+          </a:p>
+          <a:p>
+            <a:pPr>
+              <a:defRPr sz="1200" b="0">
+                <a:solidFill>
+                  <a:srgbClr val="F8FAFC"/>
+                </a:solidFill>
+                <a:latin typeface="Courier New"/>
+              </a:defRPr>
+            </a:pPr>
+            <a:r>
+              <a:rPr sz="1200" b="0">
+                <a:solidFill>
+                  <a:srgbClr val="F8FAFC"/>
+                </a:solidFill>
+                <a:latin typeface="Courier New"/>
+              </a:rPr>
+              <a:t>X = 2 * np.random.rand(m, 1)</a:t>
+            </a:r>
+          </a:p>
+          <a:p>
+            <a:pPr>
+              <a:defRPr sz="1200" b="0">
+                <a:solidFill>
+                  <a:srgbClr val="F8FAFC"/>
+                </a:solidFill>
+                <a:latin typeface="Courier New"/>
+              </a:defRPr>
+            </a:pPr>
+            <a:r>
+              <a:rPr sz="1200" b="0">
+                <a:solidFill>
+                  <a:srgbClr val="F8FAFC"/>
+                </a:solidFill>
+                <a:latin typeface="Courier New"/>
+              </a:rPr>
+              <a:t>y = 4 + 3 * X[:, 0] + np.random.randn(m)</a:t>
+            </a:r>
+          </a:p>
+          <a:p>
+            <a:pPr>
+              <a:defRPr sz="1200" b="0">
+                <a:solidFill>
+                  <a:srgbClr val="F8FAFC"/>
+                </a:solidFill>
+                <a:latin typeface="Courier New"/>
+              </a:defRPr>
+            </a:pPr>
+            <a:r>
+              <a:rPr sz="1200" b="0">
+                <a:solidFill>
+                  <a:srgbClr val="F8FAFC"/>
+                </a:solidFill>
+                <a:latin typeface="Courier New"/>
+              </a:rPr>
+              <a:t>X_b = np.c_[np.ones((m, 1)), X]</a:t>
+            </a:r>
+          </a:p>
+          <a:p>
+            <a:pPr>
+              <a:defRPr sz="1200" b="0">
+                <a:solidFill>
+                  <a:srgbClr val="F8FAFC"/>
+                </a:solidFill>
+                <a:latin typeface="Courier New"/>
+              </a:defRPr>
+            </a:pPr>
+            <a:r>
+              <a:rPr sz="1200" b="0">
+                <a:solidFill>
+                  <a:srgbClr val="F8FAFC"/>
+                </a:solidFill>
+                <a:latin typeface="Courier New"/>
+              </a:rPr>
+              <a:t>theta_true = np.array([4., 3.])</a:t>
+            </a:r>
+          </a:p>
+          <a:p>
+            <a:pPr>
+              <a:defRPr sz="1200" b="0">
+                <a:solidFill>
+                  <a:srgbClr val="F8FAFC"/>
+                </a:solidFill>
+                <a:latin typeface="Courier New"/>
+              </a:defRPr>
+            </a:pPr>
+            <a:r>
+              <a:rPr sz="1200" b="0">
+                <a:solidFill>
+                  <a:srgbClr val="F8FAFC"/>
+                </a:solidFill>
+                <a:latin typeface="Courier New"/>
+              </a:rPr>
+              <a:t>print('m =', m, '| X_b', X_b.shape)</a:t>
             </a:r>
           </a:p>
         </p:txBody>

--- a/classes/parte-1-machine-learning-clasico/070-gradient-descent-batch-stochastic-mini-batch/clase-070-gradient-descent-batch-stochastic-mini-batch-presentacion.pptx
+++ b/classes/parte-1-machine-learning-clasico/070-gradient-descent-batch-stochastic-mini-batch/clase-070-gradient-descent-batch-stochastic-mini-batch-presentacion.pptx
@@ -3272,7 +3272,7 @@
                 </a:solidFill>
                 <a:latin typeface="Segoe UI"/>
               </a:rPr>
-              <a:t>Parte: 1 — Machine Learning Clásico · Fuente: Géron, cap. 4.  Duración estimada: 60 min.</a:t>
+              <a:t>Parte: 1 — Machine Learning Clásico · Fuente: Géron, cap. 4.  Duración estimada: 60 min. · Nivel: Intermedio</a:t>
             </a:r>
           </a:p>
         </p:txBody>
@@ -3581,7 +3581,7 @@
                 </a:solidFill>
                 <a:latin typeface="Segoe UI"/>
               </a:rPr>
-              <a:t>Parte: 1 — Machine Learning Clásico · Fuente: Géron, cap. 4.  Duración estimada: 60 min.</a:t>
+              <a:t>Parte: 1 — Machine Learning Clásico · Fuente: Géron, cap. 4.  Duración estimada: 60 min. · Nivel: Intermedio</a:t>
             </a:r>
           </a:p>
         </p:txBody>
